--- a/02_실전캠프_Day2_실습제출/1조_유승균_마선생얼큰국밥/발표자료.pptx
+++ b/02_실전캠프_Day2_실습제출/1조_유승균_마선생얼큰국밥/발표자료.pptx
@@ -688,7 +688,7 @@
           <a:p>
             <a:r>
               <a:rPr lang="en-US" dirty="0"/>
-              <a:t>[60초] 마지막으로, 참여하고 달라진 저의 생각을 한마디 해 주세요 — 기록에 없어서 비워 두었습니다. 줄어드는 시간에는 매장 매뉴얼 개선, 동선 재배치, 식재료 관리, 메뉴 구성, 옵션 변경 같은 일을 해 보려고 합니다. 앞으로 할 것은 시간 직접 재기, 실제 패드 확인, 공개 저장소, 카페·분식 예시입니다. 감사합니다.</a:t>
+              <a:t>[60초] 참여하고 가장 크게 달라진 건, 깃허브 덕분에 노트북만 있으면 어디서든 업무를 이어 갈 수 있게 된 것입니다. 실제 업무 효율이 많이 좋아졌고, AI로 줄어든 시간에 매장의 다른 일을 할 수 있게 됐습니다. 그 시간에는 매장 매뉴얼 개선, 동선 재배치, 식재료 관리, 메뉴 구성, 옵션 변경 같은 일을 해 보려고 합니다. 앞으로 할 것은 시간 직접 재기, 실제 패드 확인, 공개 저장소, 카페·분식 예시입니다. 감사합니다.</a:t>
             </a:r>
             <a:endParaRPr lang="en-US" dirty="0"/>
           </a:p>
@@ -776,7 +776,7 @@
           <a:p>
             <a:r>
               <a:rPr lang="en-US" dirty="0"/>
-              <a:t>[50초] 저희는 전남 목포에서 얼큰국밥을 배민으로 팔고 있습니다. (여기서 AI 장사스쿨에 오기 전에 AI를 어떻게 생각하셨는지 한 줄 말씀해 주세요 — 기록에 없어서 비워 두었습니다.)</a:t>
+              <a:t>[50초] 저희는 전남 목포에서 얼큰국밥을 배민으로 팔고 있습니다. 참여하기 전에는 업무를 집에 가야만, 집에서 하던 일을 이어서 할 수 있었습니다.</a:t>
             </a:r>
             <a:endParaRPr lang="en-US" dirty="0"/>
           </a:p>

--- a/02_실전캠프_Day2_실습제출/1조_유승균_마선생얼큰국밥/발표자료.pptx
+++ b/02_실전캠프_Day2_실습제출/1조_유승균_마선생얼큰국밥/발표자료.pptx
@@ -1040,7 +1040,7 @@
           <a:p>
             <a:r>
               <a:rPr lang="en-US" dirty="0"/>
-              <a:t>[50초] 첫 화면 위쪽에 이 한 줄이 나옵니다. 음식값 100원을 팔면 배민에 내는 수수료·비용이 몇 원인지입니다. 데모에서는 약 28원입니다. 물음표를 누르면 무엇이 들어 있는지 설명이 나옵니다.</a:t>
+              <a:t>[50초] 첫 화면 위쪽에 이 한 줄이 나옵니다. 평균 주문 한 건에서 배민에 내는 수수료·비용이 얼마인지입니다. 데모에서는 평균 주문 16,127원 중 약 4,499원, 27.9%입니다. 물음표를 누르면 무엇이 들어 있는지 설명이 나옵니다.</a:t>
             </a:r>
             <a:endParaRPr lang="en-US" dirty="0"/>
           </a:p>
@@ -1304,7 +1304,7 @@
           <a:p>
             <a:r>
               <a:rPr lang="en-US" dirty="0"/>
-              <a:t>[60초] 도구가 만들어 주는 결과물입니다. 하나, 100원 중 배민 이용 비용 한 줄. 둘, 최근 7일을 그 전 7일과 비교한 한 줄이고, 복사 버튼으로 가족이나 직원 단톡방에 붙일 수 있습니다. 셋, 계산식으로 만든 개선 추천입니다. 지금 보시는 것은 모두 가상 데이터입니다. 우리 가게 실제 결과물은 아직 모으지 못했습니다.</a:t>
+              <a:t>[60초] 도구가 만들어 주는 결과물입니다. 하나, 평균 주문 1건당 배민 이용 비용 한 줄. 둘, 최근 7일을 그 전 7일과 비교한 한 줄이고, 복사 버튼으로 가족이나 직원 단톡방에 붙일 수 있습니다. 셋, 계산식으로 만든 개선 추천입니다. 지금 보시는 것은 모두 가상 데이터입니다. 우리 가게 실제 결과물은 아직 모으지 못했습니다.</a:t>
             </a:r>
             <a:endParaRPr lang="en-US" dirty="0"/>
           </a:p>
@@ -1392,7 +1392,7 @@
           <a:p>
             <a:r>
               <a:rPr lang="en-US" dirty="0"/>
-              <a:t>[50초] 솔직하게 말씀드리면, 전과 후의 시간은 아직 재지 못했습니다. 앞의 28원은 데모 숫자이고, 5분에서 10분은 프로그램이 알려 주는 예상 시간입니다. 이번 주에 이틀 동안 직접 재 보겠습니다. 직원이나 손님 반응도 아직 기록이 없습니다. 기능을 많이 만든 것보다 가게 일이 어떻게 달라졌는지가 중요한데, 그건 이제 재기 시작하는 단계입니다.</a:t>
+              <a:t>[50초] 솔직하게 말씀드리면, 전과 후의 시간은 아직 재지 못했습니다. 앞의 4,499원은 데모 숫자이고, 5분에서 10분은 프로그램이 알려 주는 예상 시간입니다. 이번 주에 이틀 동안 직접 재 보겠습니다. 직원이나 손님 반응도 아직 기록이 없습니다. 기능을 많이 만든 것보다 가게 일이 어떻게 달라졌는지가 중요한데, 그건 이제 재기 시작하는 단계입니다.</a:t>
             </a:r>
             <a:endParaRPr lang="en-US" dirty="0"/>
           </a:p>

--- a/02_실전캠프_Day2_실습제출/1조_유승균_마선생얼큰국밥/발표자료.pptx
+++ b/02_실전캠프_Day2_실습제출/1조_유승균_마선생얼큰국밥/발표자료.pptx
@@ -1392,7 +1392,7 @@
           <a:p>
             <a:r>
               <a:rPr lang="en-US" dirty="0"/>
-              <a:t>[50초] 솔직하게 말씀드리면, 전과 후의 시간은 아직 재지 못했습니다. 앞의 4,499원은 데모 숫자이고, 5분에서 10분은 프로그램이 알려 주는 예상 시간입니다. 이번 주에 이틀 동안 직접 재 보겠습니다. 직원이나 손님 반응도 아직 기록이 없습니다. 기능을 많이 만든 것보다 가게 일이 어떻게 달라졌는지가 중요한데, 그건 이제 재기 시작하는 단계입니다.</a:t>
+              <a:t>[50초] 시간은 이렇습니다. 예전에는 배민 정산내역을 보면서 이번 달 얼마 남았는지 계산하는 데 한두 시간쯤 걸렸습니다. 이건 제 기억이라 직접 잰 값은 아닙니다. 지금은 자료 가져오기가 5분 20초 걸렸고, 이건 직접 쟀습니다. 그래서 한 번에 한 시간 안팎을 아끼고, 제 시급 12,000원으로 치면 1만 원에서 2만 원어치 시간입니다. 앞의 4,499원은 데모 숫자입니다. 직원이나 손님 반응은 아직 기록이 없습니다. 기능을 많이 만든 것보다 가게 일이 어떻게 달라졌는지가 중요한데, 그건 이제 재기 시작하는 단계입니다.</a:t>
             </a:r>
             <a:endParaRPr lang="en-US" dirty="0"/>
           </a:p>

--- a/02_실전캠프_Day2_실습제출/1조_유승균_마선생얼큰국밥/발표자료.pptx
+++ b/02_실전캠프_Day2_실습제출/1조_유승균_마선생얼큰국밥/발표자료.pptx
@@ -864,7 +864,7 @@
           <a:p>
             <a:r>
               <a:rPr lang="en-US" dirty="0"/>
-              <a:t>[60초] 저는 배민 셀프서비스 정산내역에서 확인했습니다. 그런데 주문마다 수수료, 배달비, 광고비가 따로 적혀 있어서, 한 건을 팔면 실제로 얼마가 남는지는 제가 직접 더하고 빼야 했습니다. 이 그림은 그 모양을 다시 그린 것이고 숫자는 가상입니다.</a:t>
+              <a:t>[60초] 저는 배민 셀프서비스 정산내역에서 확인했습니다. 그런데 주문마다 중개이용료, 결제수수료, 배달비, 광고비가 따로 적혀 있어서, 한 건을 팔면 실제로 얼마가 남는지는 제가 직접 더하고 빼야 했습니다. 이 그림은 그 모양을 다시 그린 것이고 숫자는 가상입니다.</a:t>
             </a:r>
             <a:endParaRPr lang="en-US" dirty="0"/>
           </a:p>
@@ -1040,7 +1040,7 @@
           <a:p>
             <a:r>
               <a:rPr lang="en-US" dirty="0"/>
-              <a:t>[50초] 첫 화면 위쪽에 이 한 줄이 나옵니다. 평균 주문 한 건에서 배민에 내는 수수료·비용이 얼마인지입니다. 데모에서는 평균 주문 16,127원 중 약 4,499원, 27.9%입니다. 물음표를 누르면 무엇이 들어 있는지 설명이 나옵니다.</a:t>
+              <a:t>[50초] 첫 화면 위쪽에 이 한 줄이 나옵니다. 평균 주문 한 건에서 나가는 돈을 하나로 묶지 않고 항목마다 따로 보여 줍니다. 데모에서는 평균 주문 16,127원 중 플랫폼 중개이용료 약 1,097원, 결제수수료 약 484원, 배달비 약 2,510원, 부가세 등 기타 약 409원입니다. 물음표를 누르면 항목마다 무엇인지 설명이 나옵니다.</a:t>
             </a:r>
             <a:endParaRPr lang="en-US" dirty="0"/>
           </a:p>
@@ -1304,7 +1304,7 @@
           <a:p>
             <a:r>
               <a:rPr lang="en-US" dirty="0"/>
-              <a:t>[60초] 도구가 만들어 주는 결과물입니다. 하나, 평균 주문 1건당 배민 이용 비용 한 줄. 둘, 최근 7일을 그 전 7일과 비교한 한 줄이고, 복사 버튼으로 가족이나 직원 단톡방에 붙일 수 있습니다. 셋, 계산식으로 만든 개선 추천입니다. 지금 보시는 것은 모두 가상 데이터입니다. 우리 가게 실제 결과물은 아직 모으지 못했습니다.</a:t>
+              <a:t>[60초] 도구가 만들어 주는 결과물입니다. 하나, 평균 주문 1건당 항목별 금액(중개이용료·결제수수료·배달비를 따로). 둘, 최근 7일을 그 전 7일과 비교한 한 줄이고, 복사 버튼으로 가족이나 직원 단톡방에 붙일 수 있습니다. 셋, 계산식으로 만든 개선 추천입니다. 지금 보시는 것은 모두 가상 데이터입니다. 우리 가게 실제 결과물은 아직 모으지 못했습니다.</a:t>
             </a:r>
             <a:endParaRPr lang="en-US" dirty="0"/>
           </a:p>
@@ -1392,7 +1392,7 @@
           <a:p>
             <a:r>
               <a:rPr lang="en-US" dirty="0"/>
-              <a:t>[50초] 시간은 이렇습니다. 예전에는 배민 정산내역을 보면서 이번 달 얼마 남았는지 계산하는 데 한두 시간쯤 걸렸습니다. 이건 제 기억이라 직접 잰 값은 아닙니다. 지금은 자료 가져오기가 5분 20초 걸렸고, 이건 직접 쟀습니다. 그래서 한 번에 한 시간 안팎을 아끼고, 제 시급 12,000원으로 치면 1만 원에서 2만 원어치 시간입니다. 앞의 4,499원은 데모 숫자입니다. 직원이나 손님 반응은 아직 기록이 없습니다. 기능을 많이 만든 것보다 가게 일이 어떻게 달라졌는지가 중요한데, 그건 이제 재기 시작하는 단계입니다.</a:t>
+              <a:t>[50초] 시간은 이렇습니다. 예전에는 배민 정산내역을 보면서 이번 달 얼마 남았는지 계산하는 데 한두 시간쯤 걸렸습니다. 이건 제 기억이라 직접 잰 값은 아닙니다. 지금은 자료 가져오기가 5분 20초 걸렸고, 이건 직접 쟀습니다. 그래서 한 번에 한 시간 안팎을 아끼고, 제 시급 12,000원으로 치면 1만 원에서 2만 원어치 시간입니다. 앞의 금액은 데모 숫자입니다. 직원이나 손님 반응은 아직 기록이 없습니다. 기능을 많이 만든 것보다 가게 일이 어떻게 달라졌는지가 중요한데, 그건 이제 재기 시작하는 단계입니다.</a:t>
             </a:r>
             <a:endParaRPr lang="en-US" dirty="0"/>
           </a:p>
